--- a/Presentación_Hackaton.pptx
+++ b/Presentación_Hackaton.pptx
@@ -3458,45 +3458,6 @@
       </p:sp>
       <p:sp>
         <p:nvSpPr>
-          <p:cNvPr id="21" name="Text 18"/>
-          <p:cNvSpPr/>
-          <p:nvPr/>
-        </p:nvSpPr>
-        <p:spPr>
-          <a:xfrm>
-            <a:off x="457200" y="6473952"/>
-            <a:ext cx="8686800" cy="274320"/>
-          </a:xfrm>
-          <a:prstGeom prst="rect">
-            <a:avLst/>
-          </a:prstGeom>
-          <a:noFill/>
-          <a:ln/>
-        </p:spPr>
-        <p:txBody>
-          <a:bodyPr wrap="square" lIns="0" tIns="0" rIns="0" bIns="0" rtlCol="0" anchor="ctr"/>
-          <a:lstStyle/>
-          <a:p>
-            <a:pPr marL="0" indent="0">
-              <a:buNone/>
-            </a:pPr>
-            <a:r>
-              <a:rPr lang="en-US" sz="900" dirty="0">
-                <a:solidFill>
-                  <a:srgbClr val="6B7A88"/>
-                </a:solidFill>
-                <a:latin typeface="Calibri" pitchFamily="34" charset="0"/>
-                <a:ea typeface="Calibri" pitchFamily="34" charset="-122"/>
-                <a:cs typeface="Calibri" pitchFamily="34" charset="-120"/>
-              </a:rPr>
-              <a:t>TP Hackatón · Informática y Análisis 1 — Predicción de rendimiento académico</a:t>
-            </a:r>
-            <a:endParaRPr lang="en-US" sz="900" dirty="0"/>
-          </a:p>
-        </p:txBody>
-      </p:sp>
-      <p:sp>
-        <p:nvSpPr>
           <p:cNvPr id="22" name="Text 19"/>
           <p:cNvSpPr/>
           <p:nvPr/>
@@ -4391,45 +4352,6 @@
       </p:sp>
       <p:sp>
         <p:nvSpPr>
-          <p:cNvPr id="28" name="Text 26"/>
-          <p:cNvSpPr/>
-          <p:nvPr/>
-        </p:nvSpPr>
-        <p:spPr>
-          <a:xfrm>
-            <a:off x="457200" y="6473952"/>
-            <a:ext cx="8686800" cy="274320"/>
-          </a:xfrm>
-          <a:prstGeom prst="rect">
-            <a:avLst/>
-          </a:prstGeom>
-          <a:noFill/>
-          <a:ln/>
-        </p:spPr>
-        <p:txBody>
-          <a:bodyPr wrap="square" lIns="0" tIns="0" rIns="0" bIns="0" rtlCol="0" anchor="ctr"/>
-          <a:lstStyle/>
-          <a:p>
-            <a:pPr marL="0" indent="0">
-              <a:buNone/>
-            </a:pPr>
-            <a:r>
-              <a:rPr lang="en-US" sz="900" dirty="0">
-                <a:solidFill>
-                  <a:srgbClr val="6B7A88"/>
-                </a:solidFill>
-                <a:latin typeface="Calibri" pitchFamily="34" charset="0"/>
-                <a:ea typeface="Calibri" pitchFamily="34" charset="-122"/>
-                <a:cs typeface="Calibri" pitchFamily="34" charset="-120"/>
-              </a:rPr>
-              <a:t>TP Hackatón · Informática y Análisis 1 — Predicción de rendimiento académico</a:t>
-            </a:r>
-            <a:endParaRPr lang="en-US" sz="900" dirty="0"/>
-          </a:p>
-        </p:txBody>
-      </p:sp>
-      <p:sp>
-        <p:nvSpPr>
           <p:cNvPr id="29" name="Text 27"/>
           <p:cNvSpPr/>
           <p:nvPr/>
@@ -5136,45 +5058,6 @@
       </p:sp>
       <p:sp>
         <p:nvSpPr>
-          <p:cNvPr id="21" name="Text 18"/>
-          <p:cNvSpPr/>
-          <p:nvPr/>
-        </p:nvSpPr>
-        <p:spPr>
-          <a:xfrm>
-            <a:off x="457200" y="6473952"/>
-            <a:ext cx="8686800" cy="274320"/>
-          </a:xfrm>
-          <a:prstGeom prst="rect">
-            <a:avLst/>
-          </a:prstGeom>
-          <a:noFill/>
-          <a:ln/>
-        </p:spPr>
-        <p:txBody>
-          <a:bodyPr wrap="square" lIns="0" tIns="0" rIns="0" bIns="0" rtlCol="0" anchor="ctr"/>
-          <a:lstStyle/>
-          <a:p>
-            <a:pPr marL="0" indent="0">
-              <a:buNone/>
-            </a:pPr>
-            <a:r>
-              <a:rPr lang="en-US" sz="900" dirty="0">
-                <a:solidFill>
-                  <a:srgbClr val="6B7A88"/>
-                </a:solidFill>
-                <a:latin typeface="Calibri" pitchFamily="34" charset="0"/>
-                <a:ea typeface="Calibri" pitchFamily="34" charset="-122"/>
-                <a:cs typeface="Calibri" pitchFamily="34" charset="-120"/>
-              </a:rPr>
-              <a:t>TP Hackatón · Informática y Análisis 1 — Predicción de rendimiento académico</a:t>
-            </a:r>
-            <a:endParaRPr lang="en-US" sz="900" dirty="0"/>
-          </a:p>
-        </p:txBody>
-      </p:sp>
-      <p:sp>
-        <p:nvSpPr>
           <p:cNvPr id="22" name="Text 19"/>
           <p:cNvSpPr/>
           <p:nvPr/>
@@ -5395,45 +5278,6 @@
               <a:t> del Modelo (Train/Test Split)</a:t>
             </a:r>
             <a:endParaRPr lang="en-US" sz="3000" dirty="0"/>
-          </a:p>
-        </p:txBody>
-      </p:sp>
-      <p:sp>
-        <p:nvSpPr>
-          <p:cNvPr id="16" name="Text 13"/>
-          <p:cNvSpPr/>
-          <p:nvPr/>
-        </p:nvSpPr>
-        <p:spPr>
-          <a:xfrm>
-            <a:off x="457200" y="6473952"/>
-            <a:ext cx="8686800" cy="274320"/>
-          </a:xfrm>
-          <a:prstGeom prst="rect">
-            <a:avLst/>
-          </a:prstGeom>
-          <a:noFill/>
-          <a:ln/>
-        </p:spPr>
-        <p:txBody>
-          <a:bodyPr wrap="square" lIns="0" tIns="0" rIns="0" bIns="0" rtlCol="0" anchor="ctr"/>
-          <a:lstStyle/>
-          <a:p>
-            <a:pPr marL="0" indent="0">
-              <a:buNone/>
-            </a:pPr>
-            <a:r>
-              <a:rPr lang="en-US" sz="900" dirty="0">
-                <a:solidFill>
-                  <a:srgbClr val="6B7A88"/>
-                </a:solidFill>
-                <a:latin typeface="Calibri" pitchFamily="34" charset="0"/>
-                <a:ea typeface="Calibri" pitchFamily="34" charset="-122"/>
-                <a:cs typeface="Calibri" pitchFamily="34" charset="-120"/>
-              </a:rPr>
-              <a:t>TP Hackatón · Informática y Análisis 1 — Predicción de rendimiento académico</a:t>
-            </a:r>
-            <a:endParaRPr lang="en-US" sz="900" dirty="0"/>
           </a:p>
         </p:txBody>
       </p:sp>
@@ -6278,45 +6122,6 @@
               <a:t> de clasificación (Random Forest y AdaBoost) y comparar cuáles variables explican mejor el resultado, para transformarlo en una recomendación institucional.</a:t>
             </a:r>
             <a:endParaRPr lang="en-US" sz="1250" dirty="0"/>
-          </a:p>
-        </p:txBody>
-      </p:sp>
-      <p:sp>
-        <p:nvSpPr>
-          <p:cNvPr id="19" name="Text 17"/>
-          <p:cNvSpPr/>
-          <p:nvPr/>
-        </p:nvSpPr>
-        <p:spPr>
-          <a:xfrm>
-            <a:off x="457200" y="6473952"/>
-            <a:ext cx="8686800" cy="274320"/>
-          </a:xfrm>
-          <a:prstGeom prst="rect">
-            <a:avLst/>
-          </a:prstGeom>
-          <a:noFill/>
-          <a:ln/>
-        </p:spPr>
-        <p:txBody>
-          <a:bodyPr wrap="square" lIns="0" tIns="0" rIns="0" bIns="0" rtlCol="0" anchor="ctr"/>
-          <a:lstStyle/>
-          <a:p>
-            <a:pPr marL="0" indent="0">
-              <a:buNone/>
-            </a:pPr>
-            <a:r>
-              <a:rPr lang="en-US" sz="900" dirty="0">
-                <a:solidFill>
-                  <a:srgbClr val="6B7A88"/>
-                </a:solidFill>
-                <a:latin typeface="Calibri" pitchFamily="34" charset="0"/>
-                <a:ea typeface="Calibri" pitchFamily="34" charset="-122"/>
-                <a:cs typeface="Calibri" pitchFamily="34" charset="-120"/>
-              </a:rPr>
-              <a:t>TP Hackatón · Informática y Análisis 1 — Predicción de rendimiento académico</a:t>
-            </a:r>
-            <a:endParaRPr lang="en-US" sz="900" dirty="0"/>
           </a:p>
         </p:txBody>
       </p:sp>
@@ -8029,45 +7834,6 @@
       </p:graphicFrame>
       <p:sp>
         <p:nvSpPr>
-          <p:cNvPr id="16" name="Text 13"/>
-          <p:cNvSpPr/>
-          <p:nvPr/>
-        </p:nvSpPr>
-        <p:spPr>
-          <a:xfrm>
-            <a:off x="457200" y="6473952"/>
-            <a:ext cx="8686800" cy="274320"/>
-          </a:xfrm>
-          <a:prstGeom prst="rect">
-            <a:avLst/>
-          </a:prstGeom>
-          <a:noFill/>
-          <a:ln/>
-        </p:spPr>
-        <p:txBody>
-          <a:bodyPr wrap="square" lIns="0" tIns="0" rIns="0" bIns="0" rtlCol="0" anchor="ctr"/>
-          <a:lstStyle/>
-          <a:p>
-            <a:pPr marL="0" indent="0">
-              <a:buNone/>
-            </a:pPr>
-            <a:r>
-              <a:rPr lang="en-US" sz="900" dirty="0">
-                <a:solidFill>
-                  <a:srgbClr val="6B7A88"/>
-                </a:solidFill>
-                <a:latin typeface="Calibri" pitchFamily="34" charset="0"/>
-                <a:ea typeface="Calibri" pitchFamily="34" charset="-122"/>
-                <a:cs typeface="Calibri" pitchFamily="34" charset="-120"/>
-              </a:rPr>
-              <a:t>TP Hackatón · Informática y Análisis 1 — Predicción de rendimiento académico</a:t>
-            </a:r>
-            <a:endParaRPr lang="en-US" sz="900" dirty="0"/>
-          </a:p>
-        </p:txBody>
-      </p:sp>
-      <p:sp>
-        <p:nvSpPr>
           <p:cNvPr id="17" name="Text 14"/>
           <p:cNvSpPr/>
           <p:nvPr/>
@@ -8275,45 +8041,6 @@
               <a:t>Ambos modelos identifican muy bien a los alumnos que "Abandonan" (no aprueban) y confunden, sobre todo, casos límite entre "Regulariza" y "Promociona".</a:t>
             </a:r>
             <a:endParaRPr lang="en-US" sz="1100" dirty="0"/>
-          </a:p>
-        </p:txBody>
-      </p:sp>
-      <p:sp>
-        <p:nvSpPr>
-          <p:cNvPr id="7" name="Text 3"/>
-          <p:cNvSpPr/>
-          <p:nvPr/>
-        </p:nvSpPr>
-        <p:spPr>
-          <a:xfrm>
-            <a:off x="457200" y="6473952"/>
-            <a:ext cx="8686800" cy="274320"/>
-          </a:xfrm>
-          <a:prstGeom prst="rect">
-            <a:avLst/>
-          </a:prstGeom>
-          <a:noFill/>
-          <a:ln/>
-        </p:spPr>
-        <p:txBody>
-          <a:bodyPr wrap="square" lIns="0" tIns="0" rIns="0" bIns="0" rtlCol="0" anchor="ctr"/>
-          <a:lstStyle/>
-          <a:p>
-            <a:pPr marL="0" indent="0">
-              <a:buNone/>
-            </a:pPr>
-            <a:r>
-              <a:rPr lang="en-US" sz="900" dirty="0">
-                <a:solidFill>
-                  <a:srgbClr val="6B7A88"/>
-                </a:solidFill>
-                <a:latin typeface="Calibri" pitchFamily="34" charset="0"/>
-                <a:ea typeface="Calibri" pitchFamily="34" charset="-122"/>
-                <a:cs typeface="Calibri" pitchFamily="34" charset="-120"/>
-              </a:rPr>
-              <a:t>TP Hackatón · Informática y Análisis 1 — Predicción de rendimiento académico</a:t>
-            </a:r>
-            <a:endParaRPr lang="en-US" sz="900" dirty="0"/>
           </a:p>
         </p:txBody>
       </p:sp>
@@ -9947,45 +9674,6 @@
       </p:sp>
       <p:sp>
         <p:nvSpPr>
-          <p:cNvPr id="14" name="Text 12"/>
-          <p:cNvSpPr/>
-          <p:nvPr/>
-        </p:nvSpPr>
-        <p:spPr>
-          <a:xfrm>
-            <a:off x="457200" y="6473952"/>
-            <a:ext cx="8686800" cy="274320"/>
-          </a:xfrm>
-          <a:prstGeom prst="rect">
-            <a:avLst/>
-          </a:prstGeom>
-          <a:noFill/>
-          <a:ln/>
-        </p:spPr>
-        <p:txBody>
-          <a:bodyPr wrap="square" lIns="0" tIns="0" rIns="0" bIns="0" rtlCol="0" anchor="ctr"/>
-          <a:lstStyle/>
-          <a:p>
-            <a:pPr marL="0" indent="0">
-              <a:buNone/>
-            </a:pPr>
-            <a:r>
-              <a:rPr lang="en-US" sz="900" dirty="0">
-                <a:solidFill>
-                  <a:srgbClr val="9FB3C8"/>
-                </a:solidFill>
-                <a:latin typeface="Calibri" pitchFamily="34" charset="0"/>
-                <a:ea typeface="Calibri" pitchFamily="34" charset="-122"/>
-                <a:cs typeface="Calibri" pitchFamily="34" charset="-120"/>
-              </a:rPr>
-              <a:t>TP Hackatón · Informática y Análisis 1 — Predicción de rendimiento académico</a:t>
-            </a:r>
-            <a:endParaRPr lang="en-US" sz="900" dirty="0"/>
-          </a:p>
-        </p:txBody>
-      </p:sp>
-      <p:sp>
-        <p:nvSpPr>
           <p:cNvPr id="15" name="Text 13"/>
           <p:cNvSpPr/>
           <p:nvPr/>
@@ -10648,45 +10336,6 @@
       </p:sp>
       <p:sp>
         <p:nvSpPr>
-          <p:cNvPr id="18" name="Text 16"/>
-          <p:cNvSpPr/>
-          <p:nvPr/>
-        </p:nvSpPr>
-        <p:spPr>
-          <a:xfrm>
-            <a:off x="457200" y="6473952"/>
-            <a:ext cx="8686800" cy="274320"/>
-          </a:xfrm>
-          <a:prstGeom prst="rect">
-            <a:avLst/>
-          </a:prstGeom>
-          <a:noFill/>
-          <a:ln/>
-        </p:spPr>
-        <p:txBody>
-          <a:bodyPr wrap="square" lIns="0" tIns="0" rIns="0" bIns="0" rtlCol="0" anchor="ctr"/>
-          <a:lstStyle/>
-          <a:p>
-            <a:pPr marL="0" indent="0">
-              <a:buNone/>
-            </a:pPr>
-            <a:r>
-              <a:rPr lang="en-US" sz="900" dirty="0">
-                <a:solidFill>
-                  <a:srgbClr val="9FB3C8"/>
-                </a:solidFill>
-                <a:latin typeface="Calibri" pitchFamily="34" charset="0"/>
-                <a:ea typeface="Calibri" pitchFamily="34" charset="-122"/>
-                <a:cs typeface="Calibri" pitchFamily="34" charset="-120"/>
-              </a:rPr>
-              <a:t>TP Hackatón · Informática y Análisis 1 — Predicción de rendimiento académico</a:t>
-            </a:r>
-            <a:endParaRPr lang="en-US" sz="900" dirty="0"/>
-          </a:p>
-        </p:txBody>
-      </p:sp>
-      <p:sp>
-        <p:nvSpPr>
           <p:cNvPr id="19" name="Text 17"/>
           <p:cNvSpPr/>
           <p:nvPr/>
@@ -11323,45 +10972,6 @@
               <a:t>Actualizar el modelo cada cuatrimestre con datos reales (sin la variable de ruido de control) para afinar el umbral de riesgo.</a:t>
             </a:r>
             <a:endParaRPr lang="en-US" sz="1100" dirty="0"/>
-          </a:p>
-        </p:txBody>
-      </p:sp>
-      <p:sp>
-        <p:nvSpPr>
-          <p:cNvPr id="22" name="Text 20"/>
-          <p:cNvSpPr/>
-          <p:nvPr/>
-        </p:nvSpPr>
-        <p:spPr>
-          <a:xfrm>
-            <a:off x="457200" y="6473952"/>
-            <a:ext cx="8686800" cy="274320"/>
-          </a:xfrm>
-          <a:prstGeom prst="rect">
-            <a:avLst/>
-          </a:prstGeom>
-          <a:noFill/>
-          <a:ln/>
-        </p:spPr>
-        <p:txBody>
-          <a:bodyPr wrap="square" lIns="0" tIns="0" rIns="0" bIns="0" rtlCol="0" anchor="ctr"/>
-          <a:lstStyle/>
-          <a:p>
-            <a:pPr marL="0" indent="0">
-              <a:buNone/>
-            </a:pPr>
-            <a:r>
-              <a:rPr lang="en-US" sz="900" dirty="0">
-                <a:solidFill>
-                  <a:srgbClr val="6B7A88"/>
-                </a:solidFill>
-                <a:latin typeface="Calibri" pitchFamily="34" charset="0"/>
-                <a:ea typeface="Calibri" pitchFamily="34" charset="-122"/>
-                <a:cs typeface="Calibri" pitchFamily="34" charset="-120"/>
-              </a:rPr>
-              <a:t>TP Hackatón · Informática y Análisis 1 — Predicción de rendimiento académico</a:t>
-            </a:r>
-            <a:endParaRPr lang="en-US" sz="900" dirty="0"/>
           </a:p>
         </p:txBody>
       </p:sp>
@@ -12541,45 +12151,6 @@
               <a:t> de clasificación (Random Forest y AdaBoost) y comparar cuáles variables explican mejor el resultado, para transformarlo en una recomendación institucional.</a:t>
             </a:r>
             <a:endParaRPr lang="en-US" sz="1250" dirty="0"/>
-          </a:p>
-        </p:txBody>
-      </p:sp>
-      <p:sp>
-        <p:nvSpPr>
-          <p:cNvPr id="19" name="Text 17"/>
-          <p:cNvSpPr/>
-          <p:nvPr/>
-        </p:nvSpPr>
-        <p:spPr>
-          <a:xfrm>
-            <a:off x="457200" y="6473952"/>
-            <a:ext cx="8686800" cy="274320"/>
-          </a:xfrm>
-          <a:prstGeom prst="rect">
-            <a:avLst/>
-          </a:prstGeom>
-          <a:noFill/>
-          <a:ln/>
-        </p:spPr>
-        <p:txBody>
-          <a:bodyPr wrap="square" lIns="0" tIns="0" rIns="0" bIns="0" rtlCol="0" anchor="ctr"/>
-          <a:lstStyle/>
-          <a:p>
-            <a:pPr marL="0" indent="0">
-              <a:buNone/>
-            </a:pPr>
-            <a:r>
-              <a:rPr lang="en-US" sz="900" dirty="0">
-                <a:solidFill>
-                  <a:srgbClr val="6B7A88"/>
-                </a:solidFill>
-                <a:latin typeface="Calibri" pitchFamily="34" charset="0"/>
-                <a:ea typeface="Calibri" pitchFamily="34" charset="-122"/>
-                <a:cs typeface="Calibri" pitchFamily="34" charset="-120"/>
-              </a:rPr>
-              <a:t>TP Hackatón · Informática y Análisis 1 — Predicción de rendimiento académico</a:t>
-            </a:r>
-            <a:endParaRPr lang="en-US" sz="900" dirty="0"/>
           </a:p>
         </p:txBody>
       </p:sp>
@@ -14962,45 +14533,6 @@
       </p:sp>
       <p:sp>
         <p:nvSpPr>
-          <p:cNvPr id="13" name="Text 10"/>
-          <p:cNvSpPr/>
-          <p:nvPr/>
-        </p:nvSpPr>
-        <p:spPr>
-          <a:xfrm>
-            <a:off x="457200" y="6473952"/>
-            <a:ext cx="8686800" cy="274320"/>
-          </a:xfrm>
-          <a:prstGeom prst="rect">
-            <a:avLst/>
-          </a:prstGeom>
-          <a:noFill/>
-          <a:ln/>
-        </p:spPr>
-        <p:txBody>
-          <a:bodyPr wrap="square" lIns="0" tIns="0" rIns="0" bIns="0" rtlCol="0" anchor="ctr"/>
-          <a:lstStyle/>
-          <a:p>
-            <a:pPr marL="0" indent="0">
-              <a:buNone/>
-            </a:pPr>
-            <a:r>
-              <a:rPr lang="en-US" sz="900" dirty="0">
-                <a:solidFill>
-                  <a:srgbClr val="6B7A88"/>
-                </a:solidFill>
-                <a:latin typeface="Calibri" pitchFamily="34" charset="0"/>
-                <a:ea typeface="Calibri" pitchFamily="34" charset="-122"/>
-                <a:cs typeface="Calibri" pitchFamily="34" charset="-120"/>
-              </a:rPr>
-              <a:t>TP Hackatón · Informática y Análisis 1 — Predicción de rendimiento académico</a:t>
-            </a:r>
-            <a:endParaRPr lang="en-US" sz="900" dirty="0"/>
-          </a:p>
-        </p:txBody>
-      </p:sp>
-      <p:sp>
-        <p:nvSpPr>
           <p:cNvPr id="14" name="Text 11"/>
           <p:cNvSpPr/>
           <p:nvPr/>
